--- a/comms/gantry-conveyor-step-over.pptx
+++ b/comms/gantry-conveyor-step-over.pptx
@@ -122,6 +122,14 @@
     </p:ext>
   </p:extLst>
 </p:presentation>
+</file>
+
+<file path=ppt/revisionInfo.xml><?xml version="1.0" encoding="utf-8"?>
+<p1510:revInfo xmlns:a="http://schemas.openxmlformats.org/drawingml/2006/main" xmlns:r="http://schemas.openxmlformats.org/officeDocument/2006/relationships" xmlns:p1510="http://schemas.microsoft.com/office/powerpoint/2015/10/main">
+  <p1510:revLst>
+    <p1510:client id="{16F4337B-C55A-47C6-AACE-35938164EC5A}" v="9" dt="2026-08-07T14:30:52.039"/>
+  </p1510:revLst>
+</p1510:revInfo>
 </file>
 
 <file path=ppt/slideLayouts/slideLayout1.xml><?xml version="1.0" encoding="utf-8"?>
@@ -6053,11 +6061,11 @@
               </a:buClr>
             </a:pPr>
             <a:r>
-              <a:rPr lang="en-US" sz="1600" i="1">
+              <a:rPr lang="en-US" sz="1800" i="1" dirty="0">
                 <a:solidFill>
                   <a:srgbClr val="FFFFFF"/>
                 </a:solidFill>
-                <a:latin typeface="Century Gothic" panose="020B0502020202020204" pitchFamily="34" charset="0"/>
+                <a:latin typeface="+mj-lt"/>
               </a:rPr>
               <a:t>Gantry Slip and Trip – Conveyor Step-Over Fall</a:t>
             </a:r>
@@ -6075,11 +6083,11 @@
               </a:buClr>
             </a:pPr>
             <a:r>
-              <a:rPr lang="en-US" sz="1300" i="1">
+              <a:rPr lang="en-US" sz="1600" i="1" dirty="0">
                 <a:solidFill>
                   <a:srgbClr val="FFFFFF"/>
                 </a:solidFill>
-                <a:latin typeface="Century Gothic" panose="020B0502020202020204" pitchFamily="34" charset="0"/>
+                <a:latin typeface="+mj-lt"/>
               </a:rPr>
               <a:t>August 4, 2026 – Sumter, South Carolina – Fabrication / Copper, A Shift</a:t>
             </a:r>
@@ -6097,13 +6105,13 @@
               </a:buClr>
             </a:pPr>
             <a:r>
-              <a:rPr lang="en-US" sz="1300" i="1">
+              <a:rPr lang="en-US" sz="1600" i="1" dirty="0">
                 <a:solidFill>
                   <a:srgbClr val="FFFFFF"/>
                 </a:solidFill>
-                <a:latin typeface="Century Gothic" panose="020B0502020202020204" pitchFamily="34" charset="0"/>
+                <a:latin typeface="+mj-lt"/>
               </a:rPr>
-              <a:t>Plant Manager: Stephen Krajcarski (Interim), EHS Site Contact: Charlie Ball</a:t>
+              <a:t>Plant Manager: Stephen Krajcarski, EHS Site Contact: Charlie Ball</a:t>
             </a:r>
           </a:p>
         </p:txBody>
@@ -6116,19 +6124,15 @@
         </p:nvSpPr>
         <p:spPr>
           <a:xfrm>
-            <a:off x="4041648" y="1115568"/>
-            <a:ext cx="4956048" cy="960120"/>
+            <a:off x="4038600" y="1143000"/>
+            <a:ext cx="4953000" cy="983512"/>
           </a:xfrm>
           <a:prstGeom prst="rect">
             <a:avLst/>
           </a:prstGeom>
           <a:noFill/>
           <a:ln w="12700" cap="rnd">
-            <a:solidFill>
-              <a:schemeClr val="bg1">
-                <a:lumMod val="75000"/>
-              </a:schemeClr>
-            </a:solidFill>
+            <a:noFill/>
           </a:ln>
         </p:spPr>
         <p:txBody>
@@ -6151,11 +6155,10 @@
               <a:defRPr/>
             </a:pPr>
             <a:r>
-              <a:rPr lang="en-US" sz="1000" b="1" i="1" u="sng">
-                <a:solidFill>
-                  <a:srgbClr val="000000"/>
-                </a:solidFill>
-                <a:latin typeface="Century Gothic" panose="020B0502020202020204" pitchFamily="34" charset="0"/>
+              <a:rPr lang="en-US" sz="1000" b="1" i="1" u="sng" dirty="0">
+                <a:solidFill>
+                  <a:srgbClr val="030000"/>
+                </a:solidFill>
               </a:rPr>
               <a:t>Incident description:</a:t>
             </a:r>
@@ -6177,12 +6180,12 @@
               <a:defRPr/>
             </a:pPr>
             <a:r>
-              <a:rPr lang="en-US" sz="1000">
+              <a:rPr lang="en-US" sz="1000" dirty="0">
                 <a:solidFill>
                   <a:srgbClr val="000000"/>
                 </a:solidFill>
               </a:rPr>
-              <a:t>An A-shift operator pushed a load back on the Gantry 2 conveyor behind EHRT 2, saw that interleaving paper had fallen from the stack, and stepped over the conveyor to get it. Stepping back over the outside conveyor he tripped and fell head-first, striking his face. Lip laceration and sutures; returned next shift, no restrictions. Recordable injury.</a:t>
+              <a:t>An A-shift operator pushed a load back on the Gantry 2 conveyor behind EHRT 2, saw that interleaving paper had fallen from the stack, and stepped over the conveyor to get it. Stepping back over the outside conveyor he tripped and fell head-first, striking his face. Lip laceration and sutures; returned next shift, no restrictions.</a:t>
             </a:r>
           </a:p>
         </p:txBody>
@@ -6263,18 +6266,14 @@
         </p:nvSpPr>
         <p:spPr>
           <a:xfrm>
-            <a:off x="137160" y="4370832"/>
-            <a:ext cx="3730752" cy="2029968"/>
+            <a:off x="139893" y="4710023"/>
+            <a:ext cx="3728484" cy="1785668"/>
           </a:xfrm>
           <a:prstGeom prst="rect">
             <a:avLst/>
           </a:prstGeom>
           <a:ln>
-            <a:solidFill>
-              <a:schemeClr val="bg1">
-                <a:lumMod val="65000"/>
-              </a:schemeClr>
-            </a:solidFill>
+            <a:noFill/>
           </a:ln>
         </p:spPr>
         <p:txBody>
@@ -6299,25 +6298,22 @@
               <a:defRPr/>
             </a:pPr>
             <a:r>
-              <a:rPr lang="en-US" altLang="zh-CN" sz="1000" b="1" i="1" u="sng" kern="0">
+              <a:rPr lang="en-US" altLang="zh-CN" sz="1100" b="1" i="1" u="sng" kern="0" dirty="0">
                 <a:solidFill>
                   <a:srgbClr val="000000"/>
                 </a:solidFill>
-                <a:latin typeface="Century Gothic" panose="020B0502020202020204" pitchFamily="34" charset="0"/>
+                <a:latin typeface="+mj-lt"/>
+                <a:ea typeface="宋体" pitchFamily="2" charset="-122"/>
               </a:rPr>
               <a:t>How does this incident apply to you?</a:t>
             </a:r>
-          </a:p>
-          <a:p>
-            <a:pPr fontAlgn="base">
-              <a:lnSpc>
-                <a:spcPct val="90000"/>
-              </a:lnSpc>
-              <a:spcAft>
-                <a:spcPct val="0"/>
-              </a:spcAft>
-            </a:pPr>
-            <a:endParaRPr lang="en-US" sz="1000"/>
+            <a:endParaRPr lang="en-US" altLang="zh-CN" sz="1100" kern="0" dirty="0">
+              <a:solidFill>
+                <a:srgbClr val="000000"/>
+              </a:solidFill>
+              <a:latin typeface="+mj-lt"/>
+              <a:ea typeface="宋体" pitchFamily="2" charset="-122"/>
+            </a:endParaRPr>
           </a:p>
           <a:p>
             <a:pPr marL="228600" indent="-228600" fontAlgn="base">
@@ -6338,10 +6334,11 @@
               <a:defRPr/>
             </a:pPr>
             <a:r>
-              <a:rPr lang="en-US" altLang="zh-CN" sz="1000" kern="0">
+              <a:rPr lang="en-US" altLang="zh-CN" sz="900" kern="0" dirty="0">
                 <a:solidFill>
                   <a:srgbClr val="000000"/>
                 </a:solidFill>
+                <a:latin typeface="+mj-lt"/>
                 <a:cs typeface="Arial" panose="020B0604020202020204" pitchFamily="34" charset="0"/>
               </a:rPr>
               <a:t>Does anyone in your area cross a conveyor, rack, or other structure on foot to reach material or debris? Gantries 1 and 3 have the same layout, the same free rollers and the same hand push-back.</a:t>
@@ -6366,10 +6363,11 @@
               <a:defRPr/>
             </a:pPr>
             <a:r>
-              <a:rPr lang="en-US" altLang="zh-CN" sz="1000" kern="0">
+              <a:rPr lang="en-US" altLang="zh-CN" sz="900" kern="0" dirty="0">
                 <a:solidFill>
                   <a:srgbClr val="000000"/>
                 </a:solidFill>
+                <a:latin typeface="+mj-lt"/>
                 <a:cs typeface="Arial" panose="020B0604020202020204" pitchFamily="34" charset="0"/>
               </a:rPr>
               <a:t>Are your area scanners or light curtains active during loading and setup, or only while the machine is running?</a:t>
@@ -6394,10 +6392,11 @@
               <a:defRPr/>
             </a:pPr>
             <a:r>
-              <a:rPr lang="en-US" altLang="zh-CN" sz="1000" kern="0">
+              <a:rPr lang="en-US" altLang="zh-CN" sz="900" kern="0" dirty="0">
                 <a:solidFill>
                   <a:srgbClr val="000000"/>
                 </a:solidFill>
+                <a:latin typeface="+mj-lt"/>
                 <a:cs typeface="Arial" panose="020B0604020202020204" pitchFamily="34" charset="0"/>
               </a:rPr>
               <a:t>Does packaging debris — paper, plastic, banding — end up inside your machine aisles, and can anyone retrieve it without entering?</a:t>
@@ -6422,14 +6421,23 @@
               <a:defRPr/>
             </a:pPr>
             <a:r>
-              <a:rPr lang="en-US" altLang="zh-CN" sz="1000" kern="0">
+              <a:rPr lang="en-US" altLang="zh-CN" sz="900" kern="0" dirty="0">
                 <a:solidFill>
                   <a:srgbClr val="000000"/>
                 </a:solidFill>
+                <a:latin typeface="+mj-lt"/>
                 <a:cs typeface="Arial" panose="020B0604020202020204" pitchFamily="34" charset="0"/>
               </a:rPr>
               <a:t>Is there a written, trained method for returning material that does not require entering the aisle?</a:t>
             </a:r>
+            <a:endParaRPr lang="en-US" altLang="zh-CN" sz="900" kern="0" dirty="0">
+              <a:solidFill>
+                <a:srgbClr val="000000"/>
+              </a:solidFill>
+              <a:latin typeface="+mj-lt"/>
+              <a:ea typeface="宋体" pitchFamily="2" charset="-122"/>
+              <a:cs typeface="Arial" panose="020B0604020202020204" pitchFamily="34" charset="0"/>
+            </a:endParaRPr>
           </a:p>
         </p:txBody>
       </p:sp>
@@ -6441,8 +6449,8 @@
         </p:nvSpPr>
         <p:spPr>
           <a:xfrm>
-            <a:off x="4041648" y="5056632"/>
-            <a:ext cx="4956048" cy="1371600"/>
+            <a:off x="4038600" y="4968815"/>
+            <a:ext cx="4953000" cy="1540577"/>
           </a:xfrm>
           <a:prstGeom prst="rect">
             <a:avLst/>
@@ -6451,11 +6459,7 @@
             <a:schemeClr val="bg2"/>
           </a:solidFill>
           <a:ln w="12700" cap="rnd">
-            <a:solidFill>
-              <a:schemeClr val="bg1">
-                <a:lumMod val="75000"/>
-              </a:schemeClr>
-            </a:solidFill>
+            <a:noFill/>
           </a:ln>
         </p:spPr>
         <p:txBody>
@@ -6478,11 +6482,10 @@
               <a:defRPr/>
             </a:pPr>
             <a:r>
-              <a:rPr lang="en-US" sz="1000" b="1" i="1" u="sng">
+              <a:rPr lang="en-US" sz="1000" b="1" i="1" u="sng" dirty="0">
                 <a:solidFill>
                   <a:srgbClr val="000000"/>
                 </a:solidFill>
-                <a:latin typeface="Century Gothic" panose="020B0502020202020204" pitchFamily="34" charset="0"/>
               </a:rPr>
               <a:t>Interim Containment Actions:</a:t>
             </a:r>
@@ -6503,7 +6506,7 @@
               <a:defRPr/>
             </a:pPr>
             <a:r>
-              <a:rPr lang="en-US" sz="1000">
+              <a:rPr lang="en-US" sz="900" dirty="0">
                 <a:solidFill>
                   <a:srgbClr val="000000"/>
                 </a:solidFill>
@@ -6527,7 +6530,7 @@
               <a:defRPr/>
             </a:pPr>
             <a:r>
-              <a:rPr lang="en-US" sz="1000">
+              <a:rPr lang="en-US" sz="900" dirty="0">
                 <a:solidFill>
                   <a:srgbClr val="000000"/>
                 </a:solidFill>
@@ -6551,7 +6554,7 @@
               <a:defRPr/>
             </a:pPr>
             <a:r>
-              <a:rPr lang="en-US" sz="1000">
+              <a:rPr lang="en-US" sz="900" dirty="0">
                 <a:solidFill>
                   <a:srgbClr val="000000"/>
                 </a:solidFill>
@@ -6576,37 +6579,12 @@
               <a:defRPr/>
             </a:pPr>
             <a:r>
-              <a:rPr lang="en-US" sz="1000" b="1" i="1" u="sng">
+              <a:rPr lang="en-US" sz="1000" b="1" i="1" u="sng" dirty="0">
                 <a:solidFill>
                   <a:srgbClr val="000000"/>
                 </a:solidFill>
-                <a:latin typeface="Century Gothic" panose="020B0502020202020204" pitchFamily="34" charset="0"/>
               </a:rPr>
               <a:t>Preventive &amp; Corrective Actions:</a:t>
-            </a:r>
-          </a:p>
-          <a:p>
-            <a:pPr marL="228600" indent="-228600" fontAlgn="base">
-              <a:lnSpc>
-                <a:spcPct val="110000"/>
-              </a:lnSpc>
-              <a:spcAft>
-                <a:spcPct val="0"/>
-              </a:spcAft>
-              <a:buClr>
-                <a:srgbClr val="3367CD"/>
-              </a:buClr>
-              <a:buFontTx/>
-              <a:buAutoNum type="arabicPeriod" startAt="1"/>
-              <a:defRPr/>
-            </a:pPr>
-            <a:r>
-              <a:rPr lang="en-US" sz="1000">
-                <a:solidFill>
-                  <a:srgbClr val="000000"/>
-                </a:solidFill>
-              </a:rPr>
-              <a:t>Method now in force — push from the middle face only and exit the way you came in. Do not cross a conveyor on foot.</a:t>
             </a:r>
           </a:p>
           <a:p>
@@ -6625,12 +6603,12 @@
               <a:defRPr/>
             </a:pPr>
             <a:r>
-              <a:rPr lang="en-US" sz="1000">
+              <a:rPr lang="en-US" sz="1000" dirty="0">
                 <a:solidFill>
                   <a:srgbClr val="000000"/>
                 </a:solidFill>
               </a:rPr>
-              <a:t>6-inch and 8-inch copper is a two-person push, one per outside face.</a:t>
+              <a:t>Method now in force - push from the middle face only and exit the way you came in. Do not cross a conveyor on foot.</a:t>
             </a:r>
           </a:p>
           <a:p>
@@ -6649,13 +6627,116 @@
               <a:defRPr/>
             </a:pPr>
             <a:r>
-              <a:rPr lang="en-US" sz="1000">
+              <a:rPr lang="en-US" sz="1000" dirty="0">
+                <a:solidFill>
+                  <a:srgbClr val="000000"/>
+                </a:solidFill>
+              </a:rPr>
+              <a:t>6-inch and 8-inch copper is a two-person push, one per outside face.</a:t>
+            </a:r>
+          </a:p>
+          <a:p>
+            <a:pPr marL="228600" indent="-228600" fontAlgn="base">
+              <a:lnSpc>
+                <a:spcPct val="110000"/>
+              </a:lnSpc>
+              <a:spcAft>
+                <a:spcPct val="0"/>
+              </a:spcAft>
+              <a:buClr>
+                <a:srgbClr val="3367CD"/>
+              </a:buClr>
+              <a:buFontTx/>
+              <a:buAutoNum type="arabicPeriod"/>
+              <a:defRPr/>
+            </a:pPr>
+            <a:r>
+              <a:rPr lang="en-US" sz="1000" dirty="0">
                 <a:solidFill>
                   <a:srgbClr val="000000"/>
                 </a:solidFill>
               </a:rPr>
               <a:t>Do-not-enter signage made permanent at both ends of each aisle.</a:t>
             </a:r>
+          </a:p>
+        </p:txBody>
+      </p:sp>
+      <p:sp>
+        <p:nvSpPr>
+          <p:cNvPr id="2" name="Rectangle 1"/>
+          <p:cNvSpPr/>
+          <p:nvPr/>
+        </p:nvSpPr>
+        <p:spPr bwMode="auto">
+          <a:xfrm>
+            <a:off x="2362200" y="1524000"/>
+            <a:ext cx="1066800" cy="685800"/>
+          </a:xfrm>
+          <a:prstGeom prst="rect">
+            <a:avLst/>
+          </a:prstGeom>
+          <a:noFill/>
+          <a:ln>
+            <a:noFill/>
+          </a:ln>
+          <a:effectLst/>
+          <a:extLst>
+            <a:ext uri="{909E8E84-426E-40DD-AFC4-6F175D3DCCD1}">
+              <a14:hiddenFill xmlns:a14="http://schemas.microsoft.com/office/drawing/2010/main">
+                <a:solidFill>
+                  <a:schemeClr val="accent1"/>
+                </a:solidFill>
+              </a14:hiddenFill>
+            </a:ext>
+            <a:ext uri="{91240B29-F687-4F45-9708-019B960494DF}">
+              <a14:hiddenLine xmlns:a14="http://schemas.microsoft.com/office/drawing/2010/main" w="9525" cap="flat" cmpd="sng" algn="ctr">
+                <a:solidFill>
+                  <a:schemeClr val="tx1"/>
+                </a:solidFill>
+                <a:prstDash val="solid"/>
+                <a:round/>
+                <a:headEnd type="none" w="med" len="med"/>
+                <a:tailEnd type="none" w="med" len="med"/>
+              </a14:hiddenLine>
+            </a:ext>
+            <a:ext uri="{AF507438-7753-43E0-B8FC-AC1667EBCBE1}">
+              <a14:hiddenEffects xmlns:a14="http://schemas.microsoft.com/office/drawing/2010/main">
+                <a:effectLst>
+                  <a:outerShdw dist="35921" dir="2700000" algn="ctr" rotWithShape="0">
+                    <a:schemeClr val="bg2"/>
+                  </a:outerShdw>
+                </a:effectLst>
+              </a14:hiddenEffects>
+            </a:ext>
+          </a:extLst>
+        </p:spPr>
+        <p:txBody>
+          <a:bodyPr vert="horz" wrap="square" lIns="91440" tIns="45720" rIns="91440" bIns="45720" numCol="1" rtlCol="0" anchor="t" anchorCtr="0" compatLnSpc="1">
+            <a:prstTxWarp prst="textNoShape">
+              <a:avLst/>
+            </a:prstTxWarp>
+          </a:bodyPr>
+          <a:lstStyle/>
+          <a:p>
+            <a:pPr fontAlgn="base">
+              <a:lnSpc>
+                <a:spcPct val="110000"/>
+              </a:lnSpc>
+              <a:spcBef>
+                <a:spcPct val="20000"/>
+              </a:spcBef>
+              <a:spcAft>
+                <a:spcPct val="0"/>
+              </a:spcAft>
+              <a:buClr>
+                <a:srgbClr val="3367CD"/>
+              </a:buClr>
+            </a:pPr>
+            <a:endParaRPr lang="en-US" sz="1600">
+              <a:solidFill>
+                <a:srgbClr val="000000"/>
+              </a:solidFill>
+            </a:endParaRPr>
           </a:p>
         </p:txBody>
       </p:sp>
@@ -6667,24 +6748,143 @@
         </p:nvSpPr>
         <p:spPr>
           <a:xfrm>
-            <a:off x="4041648" y="2103120"/>
-            <a:ext cx="4956048" cy="2926080"/>
+            <a:off x="4038600" y="2024329"/>
+            <a:ext cx="4953000" cy="2944486"/>
           </a:xfrm>
           <a:prstGeom prst="rect">
             <a:avLst/>
           </a:prstGeom>
           <a:noFill/>
           <a:ln w="12700" cap="rnd">
-            <a:solidFill>
-              <a:schemeClr val="bg1">
-                <a:lumMod val="75000"/>
-              </a:schemeClr>
-            </a:solidFill>
+            <a:noFill/>
           </a:ln>
         </p:spPr>
         <p:txBody>
           <a:bodyPr/>
           <a:lstStyle/>
+          <a:p>
+            <a:pPr fontAlgn="base">
+              <a:lnSpc>
+                <a:spcPct val="110000"/>
+              </a:lnSpc>
+              <a:spcAft>
+                <a:spcPct val="0"/>
+              </a:spcAft>
+              <a:buClr>
+                <a:srgbClr val="3367CD"/>
+              </a:buClr>
+              <a:defRPr/>
+            </a:pPr>
+            <a:r>
+              <a:rPr lang="en-US" sz="1000" b="1" i="1" u="sng" dirty="0">
+                <a:solidFill>
+                  <a:srgbClr val="000000"/>
+                </a:solidFill>
+                <a:latin typeface="+mj-lt"/>
+              </a:rPr>
+              <a:t>Investigation Findings:</a:t>
+            </a:r>
+          </a:p>
+          <a:p>
+            <a:pPr marL="228600" indent="-228600" fontAlgn="base">
+              <a:lnSpc>
+                <a:spcPct val="110000"/>
+              </a:lnSpc>
+              <a:spcAft>
+                <a:spcPct val="0"/>
+              </a:spcAft>
+              <a:buClr>
+                <a:srgbClr val="3367CD"/>
+              </a:buClr>
+              <a:buFontTx/>
+              <a:buAutoNum type="arabicPeriod"/>
+              <a:defRPr/>
+            </a:pPr>
+            <a:r>
+              <a:rPr lang="en-US" sz="1000" dirty="0">
+                <a:solidFill>
+                  <a:srgbClr val="000000"/>
+                </a:solidFill>
+                <a:latin typeface="+mj-lt"/>
+              </a:rPr>
+              <a:t>Four conveyors at Gantry 2 — all free rollers. Stacks are pushed back by hand from inside the center aisle.</a:t>
+            </a:r>
+          </a:p>
+          <a:p>
+            <a:pPr marL="228600" indent="-228600" fontAlgn="base">
+              <a:lnSpc>
+                <a:spcPct val="110000"/>
+              </a:lnSpc>
+              <a:spcAft>
+                <a:spcPct val="0"/>
+              </a:spcAft>
+              <a:buClr>
+                <a:srgbClr val="3367CD"/>
+              </a:buClr>
+              <a:buFontTx/>
+              <a:buAutoNum type="arabicPeriod"/>
+              <a:defRPr/>
+            </a:pPr>
+            <a:r>
+              <a:rPr lang="en-US" sz="1000" dirty="0">
+                <a:solidFill>
+                  <a:srgbClr val="000000"/>
+                </a:solidFill>
+                <a:latin typeface="+mj-lt"/>
+              </a:rPr>
+              <a:t>Paper fell between the rollers. He entered the aisle to get it, then crossed the outside conveyor to exit rather than walking back out. His foot caught; the fall was head-first with no hands out.</a:t>
+            </a:r>
+          </a:p>
+          <a:p>
+            <a:pPr marL="228600" indent="-228600" fontAlgn="base">
+              <a:lnSpc>
+                <a:spcPct val="110000"/>
+              </a:lnSpc>
+              <a:spcAft>
+                <a:spcPct val="0"/>
+              </a:spcAft>
+              <a:buClr>
+                <a:srgbClr val="3367CD"/>
+              </a:buClr>
+              <a:buFontTx/>
+              <a:buAutoNum type="arabicPeriod"/>
+              <a:defRPr/>
+            </a:pPr>
+            <a:r>
+              <a:rPr lang="en-US" sz="1000" dirty="0">
+                <a:solidFill>
+                  <a:srgbClr val="000000"/>
+                </a:solidFill>
+                <a:latin typeface="+mj-lt"/>
+              </a:rPr>
+              <a:t>Area scanners stop the gantry when someone enters the zone, but are off during loading — the aisle was unguarded.</a:t>
+            </a:r>
+          </a:p>
+          <a:p>
+            <a:pPr marL="228600" indent="-228600" fontAlgn="base">
+              <a:lnSpc>
+                <a:spcPct val="110000"/>
+              </a:lnSpc>
+              <a:spcAft>
+                <a:spcPct val="0"/>
+              </a:spcAft>
+              <a:buClr>
+                <a:srgbClr val="3367CD"/>
+              </a:buClr>
+              <a:buFontTx/>
+              <a:buAutoNum type="arabicPeriod"/>
+              <a:defRPr/>
+            </a:pPr>
+            <a:r>
+              <a:rPr lang="en-US" sz="1000" dirty="0">
+                <a:solidFill>
+                  <a:srgbClr val="000000"/>
+                </a:solidFill>
+                <a:latin typeface="+mj-lt"/>
+              </a:rPr>
+              <a:t>Interleaving paper is a supplier fix for water spotting; packaging has drifted and it now arrives loose. Receiving inspection is written into the method sheet but is not performed.</a:t>
+            </a:r>
+          </a:p>
           <a:p>
             <a:pPr fontAlgn="base">
               <a:lnSpc>
@@ -6702,13 +6902,12 @@
               <a:defRPr/>
             </a:pPr>
             <a:r>
-              <a:rPr lang="en-US" sz="1000" b="1" i="1" u="sng">
+              <a:rPr lang="en-US" sz="1000" b="1" i="1" u="sng" dirty="0">
                 <a:solidFill>
                   <a:srgbClr val="000000"/>
                 </a:solidFill>
-                <a:latin typeface="Century Gothic" panose="020B0502020202020204" pitchFamily="34" charset="0"/>
               </a:rPr>
-              <a:t>Investigation Findings:</a:t>
+              <a:t>Root Causes and Management System Gaps:</a:t>
             </a:r>
           </a:p>
           <a:p>
@@ -6727,12 +6926,20 @@
               <a:defRPr/>
             </a:pPr>
             <a:r>
-              <a:rPr lang="en-US" sz="1000">
+              <a:rPr lang="en-US" sz="1000" b="1" dirty="0">
                 <a:solidFill>
                   <a:srgbClr val="000000"/>
                 </a:solidFill>
               </a:rPr>
-              <a:t>Four conveyors meet at Gantry 2 — a middle face and two outside faces, all free rollers. Stacks are pushed back by hand from inside the aisle.</a:t>
+              <a:t>Immediate cause — </a:t>
+            </a:r>
+            <a:r>
+              <a:rPr lang="en-US" sz="1000" dirty="0">
+                <a:solidFill>
+                  <a:srgbClr val="000000"/>
+                </a:solidFill>
+              </a:rPr>
+              <a:t>Poor Work Practice; Eyes or Mind Not on Task.</a:t>
             </a:r>
           </a:p>
           <a:p>
@@ -6751,12 +6958,20 @@
               <a:defRPr/>
             </a:pPr>
             <a:r>
-              <a:rPr lang="en-US" sz="1000">
+              <a:rPr lang="en-US" sz="1000" b="1" dirty="0">
                 <a:solidFill>
                   <a:srgbClr val="000000"/>
                 </a:solidFill>
               </a:rPr>
-              <a:t>Paper fell between the rollers. He entered the aisle to get it, then crossed the outside conveyor to exit rather than walking back out. His foot caught; the fall was head-first with no hands out.</a:t>
+              <a:t>Processes not (continuously) monitored for effectiveness — </a:t>
+            </a:r>
+            <a:r>
+              <a:rPr lang="en-US" sz="1000" dirty="0">
+                <a:solidFill>
+                  <a:srgbClr val="000000"/>
+                </a:solidFill>
+              </a:rPr>
+              <a:t>area scanners guard the aisle only while the gantry runs, not while it is being loaded.</a:t>
             </a:r>
           </a:p>
           <a:p>
@@ -6775,12 +6990,20 @@
               <a:defRPr/>
             </a:pPr>
             <a:r>
-              <a:rPr lang="en-US" sz="1000">
+              <a:rPr lang="en-US" sz="1000" b="1" dirty="0">
                 <a:solidFill>
                   <a:srgbClr val="000000"/>
                 </a:solidFill>
               </a:rPr>
-              <a:t>Area scanners stop the gantry when someone enters the zone, but are off during loading — the aisle was unguarded.</a:t>
+              <a:t>Processes have not been created — </a:t>
+            </a:r>
+            <a:r>
+              <a:rPr lang="en-US" sz="1000" dirty="0">
+                <a:solidFill>
+                  <a:srgbClr val="000000"/>
+                </a:solidFill>
+              </a:rPr>
+              <a:t>receiving inspection is documented but not performed, so packaging drift puts loose paper into the machine aisle.</a:t>
             </a:r>
           </a:p>
           <a:p>
@@ -6798,23 +7021,17 @@
               <a:buAutoNum type="arabicPeriod"/>
               <a:defRPr/>
             </a:pPr>
-            <a:r>
-              <a:rPr lang="en-US" sz="1000">
-                <a:solidFill>
-                  <a:srgbClr val="000000"/>
-                </a:solidFill>
-              </a:rPr>
-              <a:t>Interleaving paper is a supplier fix for water spotting; packaging has drifted and it now arrives loose. Receiving inspection is written into the method sheet but is not performed.</a:t>
-            </a:r>
+            <a:endParaRPr lang="en-US" sz="900" dirty="0">
+              <a:solidFill>
+                <a:srgbClr val="000000"/>
+              </a:solidFill>
+            </a:endParaRPr>
           </a:p>
           <a:p>
             <a:pPr fontAlgn="base">
               <a:lnSpc>
                 <a:spcPct val="110000"/>
               </a:lnSpc>
-              <a:spcBef>
-                <a:spcPct val="20000"/>
-              </a:spcBef>
               <a:spcAft>
                 <a:spcPct val="0"/>
               </a:spcAft>
@@ -6823,345 +7040,129 @@
               </a:buClr>
               <a:defRPr/>
             </a:pPr>
-            <a:r>
-              <a:rPr lang="en-US" sz="1000" b="1" i="1" u="sng">
-                <a:solidFill>
-                  <a:srgbClr val="000000"/>
-                </a:solidFill>
-                <a:latin typeface="Century Gothic" panose="020B0502020202020204" pitchFamily="34" charset="0"/>
-              </a:rPr>
-              <a:t>Root Causes and Management System Gaps:</a:t>
-            </a:r>
-          </a:p>
-          <a:p>
-            <a:pPr marL="228600" indent="-228600" fontAlgn="base">
-              <a:lnSpc>
-                <a:spcPct val="110000"/>
-              </a:lnSpc>
-              <a:spcAft>
-                <a:spcPct val="0"/>
-              </a:spcAft>
-              <a:buClr>
-                <a:srgbClr val="3367CD"/>
-              </a:buClr>
-              <a:buFontTx/>
-              <a:buAutoNum type="arabicPeriod" startAt="1"/>
-              <a:defRPr/>
-            </a:pPr>
-            <a:r>
-              <a:rPr lang="en-US" sz="1000" b="1">
-                <a:solidFill>
-                  <a:srgbClr val="000000"/>
-                </a:solidFill>
-              </a:rPr>
-              <a:t xml:space="preserve">Immediate cause — </a:t>
-            </a:r>
-            <a:r>
-              <a:rPr lang="en-US" sz="1000">
-                <a:solidFill>
-                  <a:srgbClr val="000000"/>
-                </a:solidFill>
-              </a:rPr>
-              <a:t>Poor Work Practice; Eyes or Mind Not on Task.</a:t>
-            </a:r>
-          </a:p>
-          <a:p>
-            <a:pPr marL="228600" indent="-228600" fontAlgn="base">
-              <a:lnSpc>
-                <a:spcPct val="110000"/>
-              </a:lnSpc>
-              <a:spcAft>
-                <a:spcPct val="0"/>
-              </a:spcAft>
-              <a:buClr>
-                <a:srgbClr val="3367CD"/>
-              </a:buClr>
-              <a:buFontTx/>
-              <a:buAutoNum type="arabicPeriod"/>
-              <a:defRPr/>
-            </a:pPr>
-            <a:r>
-              <a:rPr lang="en-US" sz="1000" b="1">
-                <a:solidFill>
-                  <a:srgbClr val="000000"/>
-                </a:solidFill>
-              </a:rPr>
-              <a:t xml:space="preserve">(Improved) processes have not been created — </a:t>
-            </a:r>
-            <a:r>
-              <a:rPr lang="en-US" sz="1000">
-                <a:solidFill>
-                  <a:srgbClr val="000000"/>
-                </a:solidFill>
-              </a:rPr>
-              <a:t>nothing prohibits crossing a conveyor on foot, and free rollers make hand push-back the only way to return a stack.</a:t>
-            </a:r>
-          </a:p>
-          <a:p>
-            <a:pPr marL="228600" indent="-228600" fontAlgn="base">
-              <a:lnSpc>
-                <a:spcPct val="110000"/>
-              </a:lnSpc>
-              <a:spcAft>
-                <a:spcPct val="0"/>
-              </a:spcAft>
-              <a:buClr>
-                <a:srgbClr val="3367CD"/>
-              </a:buClr>
-              <a:buFontTx/>
-              <a:buAutoNum type="arabicPeriod"/>
-              <a:defRPr/>
-            </a:pPr>
-            <a:r>
-              <a:rPr lang="en-US" sz="1000" b="1">
-                <a:solidFill>
-                  <a:srgbClr val="000000"/>
-                </a:solidFill>
-              </a:rPr>
-              <a:t xml:space="preserve">Processes not (continuously) monitored for effectiveness — </a:t>
-            </a:r>
-            <a:r>
-              <a:rPr lang="en-US" sz="1000">
-                <a:solidFill>
-                  <a:srgbClr val="000000"/>
-                </a:solidFill>
-              </a:rPr>
-              <a:t>area scanners guard the aisle only while the gantry runs, not while it is being loaded.</a:t>
-            </a:r>
-          </a:p>
-          <a:p>
-            <a:pPr marL="228600" indent="-228600" fontAlgn="base">
-              <a:lnSpc>
-                <a:spcPct val="110000"/>
-              </a:lnSpc>
-              <a:spcAft>
-                <a:spcPct val="0"/>
-              </a:spcAft>
-              <a:buClr>
-                <a:srgbClr val="3367CD"/>
-              </a:buClr>
-              <a:buFontTx/>
-              <a:buAutoNum type="arabicPeriod"/>
-              <a:defRPr/>
-            </a:pPr>
-            <a:r>
-              <a:rPr lang="en-US" sz="1000" b="1">
-                <a:solidFill>
-                  <a:srgbClr val="000000"/>
-                </a:solidFill>
-              </a:rPr>
-              <a:t xml:space="preserve">Processes have not been created — </a:t>
-            </a:r>
-            <a:r>
-              <a:rPr lang="en-US" sz="1000">
-                <a:solidFill>
-                  <a:srgbClr val="000000"/>
-                </a:solidFill>
-              </a:rPr>
-              <a:t>receiving inspection is documented but not performed, so packaging drift puts loose paper into the machine aisle.</a:t>
-            </a:r>
+            <a:endParaRPr lang="en-US" sz="900" dirty="0">
+              <a:solidFill>
+                <a:srgbClr val="000000"/>
+              </a:solidFill>
+            </a:endParaRPr>
           </a:p>
         </p:txBody>
       </p:sp>
+      <p:pic>
+        <p:nvPicPr>
+          <p:cNvPr id="5" name="Picture 4">
+            <a:extLst>
+              <a:ext uri="{FF2B5EF4-FFF2-40B4-BE49-F238E27FC236}">
+                <a16:creationId xmlns:a16="http://schemas.microsoft.com/office/drawing/2014/main" id="{20F65F50-AD21-D2B5-6613-DA9E456B570F}"/>
+              </a:ext>
+            </a:extLst>
+          </p:cNvPr>
+          <p:cNvPicPr>
+            <a:picLocks noChangeAspect="1"/>
+          </p:cNvPicPr>
+          <p:nvPr/>
+        </p:nvPicPr>
+        <p:blipFill>
+          <a:blip r:embed="rId2" cstate="print">
+            <a:extLst>
+              <a:ext uri="{28A0092B-C50C-407E-A947-70E740481C1C}">
+                <a14:useLocalDpi xmlns:a14="http://schemas.microsoft.com/office/drawing/2010/main" val="0"/>
+              </a:ext>
+            </a:extLst>
+          </a:blip>
+          <a:stretch>
+            <a:fillRect/>
+          </a:stretch>
+        </p:blipFill>
+        <p:spPr>
+          <a:xfrm rot="5400000">
+            <a:off x="-520318" y="1867266"/>
+            <a:ext cx="3086099" cy="1885950"/>
+          </a:xfrm>
+          <a:prstGeom prst="rect">
+            <a:avLst/>
+          </a:prstGeom>
+          <a:ln w="38100" cap="sq">
+            <a:solidFill>
+              <a:srgbClr val="000000"/>
+            </a:solidFill>
+            <a:prstDash val="solid"/>
+            <a:miter lim="800000"/>
+          </a:ln>
+          <a:effectLst>
+            <a:outerShdw blurRad="50800" dist="38100" dir="2700000" algn="tl" rotWithShape="0">
+              <a:srgbClr val="000000">
+                <a:alpha val="43000"/>
+              </a:srgbClr>
+            </a:outerShdw>
+          </a:effectLst>
+        </p:spPr>
+      </p:pic>
+      <p:pic>
+        <p:nvPicPr>
+          <p:cNvPr id="9" name="Picture 8">
+            <a:extLst>
+              <a:ext uri="{FF2B5EF4-FFF2-40B4-BE49-F238E27FC236}">
+                <a16:creationId xmlns:a16="http://schemas.microsoft.com/office/drawing/2014/main" id="{AC419A35-5025-56E6-5D83-D20056DEAEE4}"/>
+              </a:ext>
+            </a:extLst>
+          </p:cNvPr>
+          <p:cNvPicPr>
+            <a:picLocks noChangeAspect="1"/>
+          </p:cNvPicPr>
+          <p:nvPr/>
+        </p:nvPicPr>
+        <p:blipFill>
+          <a:blip r:embed="rId3" cstate="print">
+            <a:extLst>
+              <a:ext uri="{28A0092B-C50C-407E-A947-70E740481C1C}">
+                <a14:useLocalDpi xmlns:a14="http://schemas.microsoft.com/office/drawing/2010/main" val="0"/>
+              </a:ext>
+            </a:extLst>
+          </a:blip>
+          <a:stretch>
+            <a:fillRect/>
+          </a:stretch>
+        </p:blipFill>
+        <p:spPr>
+          <a:xfrm rot="5400000">
+            <a:off x="1513790" y="1867266"/>
+            <a:ext cx="3086101" cy="1885951"/>
+          </a:xfrm>
+          <a:prstGeom prst="rect">
+            <a:avLst/>
+          </a:prstGeom>
+          <a:ln w="38100" cap="sq">
+            <a:solidFill>
+              <a:srgbClr val="000000"/>
+            </a:solidFill>
+            <a:prstDash val="solid"/>
+            <a:miter lim="800000"/>
+          </a:ln>
+          <a:effectLst>
+            <a:outerShdw blurRad="50800" dist="38100" dir="2700000" algn="tl" rotWithShape="0">
+              <a:srgbClr val="000000">
+                <a:alpha val="43000"/>
+              </a:srgbClr>
+            </a:outerShdw>
+          </a:effectLst>
+        </p:spPr>
+      </p:pic>
       <p:sp>
         <p:nvSpPr>
-          <p:cNvPr id="90" name="Photo A"/>
+          <p:cNvPr id="14" name="Caption A">
+            <a:extLst>
+              <a:ext uri="{FF2B5EF4-FFF2-40B4-BE49-F238E27FC236}">
+                <a16:creationId xmlns:a16="http://schemas.microsoft.com/office/drawing/2014/main" id="{C2F2355D-5206-E8E4-8A2E-AB3A2F986BF5}"/>
+              </a:ext>
+            </a:extLst>
+          </p:cNvPr>
           <p:cNvSpPr/>
           <p:nvPr/>
         </p:nvSpPr>
         <p:spPr>
           <a:xfrm>
-            <a:off x="182880" y="1572768"/>
-            <a:ext cx="1755648" cy="2340864"/>
-          </a:xfrm>
-          <a:prstGeom prst="rect">
-            <a:avLst/>
-          </a:prstGeom>
-          <a:solidFill>
-            <a:srgbClr val="F2F2F2"/>
-          </a:solidFill>
-          <a:ln w="12700">
-            <a:solidFill>
-              <a:srgbClr val="A6A6A6"/>
-            </a:solidFill>
-            <a:prstDash val="dash"/>
-          </a:ln>
-        </p:spPr>
-        <p:txBody>
-          <a:bodyPr lIns="45716" tIns="45716" rIns="45716" bIns="45716" anchor="ctr">
-            <a:normAutofit/>
-          </a:bodyPr>
-          <a:lstStyle/>
-          <a:p>
-            <a:pPr algn="ctr">
-              <a:lnSpc>
-                <a:spcPct val="100000"/>
-              </a:lnSpc>
-            </a:pPr>
-            <a:r>
-              <a:rPr lang="en-US" sz="900" b="1">
-                <a:solidFill>
-                  <a:srgbClr val="7F7F7F"/>
-                </a:solidFill>
-                <a:latin typeface="Century Gothic" panose="020B0502020202020204" pitchFamily="34" charset="0"/>
-              </a:rPr>
-              <a:t>PHOTO A</a:t>
-            </a:r>
-          </a:p>
-          <a:p>
-            <a:pPr algn="ctr">
-              <a:lnSpc>
-                <a:spcPct val="100000"/>
-              </a:lnSpc>
-            </a:pPr>
-            <a:r>
-              <a:rPr lang="en-US" sz="900" b="0">
-                <a:solidFill>
-                  <a:srgbClr val="7F7F7F"/>
-                </a:solidFill>
-                <a:latin typeface="Century Gothic" panose="020B0502020202020204" pitchFamily="34" charset="0"/>
-              </a:rPr>
-              <a:t>Path taken — aisle</a:t>
-            </a:r>
-          </a:p>
-          <a:p>
-            <a:pPr algn="ctr">
-              <a:lnSpc>
-                <a:spcPct val="100000"/>
-              </a:lnSpc>
-            </a:pPr>
-            <a:r>
-              <a:rPr lang="en-US" sz="900" b="0">
-                <a:solidFill>
-                  <a:srgbClr val="7F7F7F"/>
-                </a:solidFill>
-                <a:latin typeface="Century Gothic" panose="020B0502020202020204" pitchFamily="34" charset="0"/>
-              </a:rPr>
-              <a:t>and outside conveyor</a:t>
-            </a:r>
-          </a:p>
-          <a:p>
-            <a:pPr algn="ctr">
-              <a:lnSpc>
-                <a:spcPct val="100000"/>
-              </a:lnSpc>
-            </a:pPr>
-            <a:r>
-              <a:rPr lang="en-US" sz="900" b="0">
-                <a:solidFill>
-                  <a:srgbClr val="7F7F7F"/>
-                </a:solidFill>
-                <a:latin typeface="Century Gothic" panose="020B0502020202020204" pitchFamily="34" charset="0"/>
-              </a:rPr>
-              <a:t>crossed on foot</a:t>
-            </a:r>
-          </a:p>
-        </p:txBody>
-      </p:sp>
-      <p:sp>
-        <p:nvSpPr>
-          <p:cNvPr id="91" name="Photo B"/>
-          <p:cNvSpPr/>
-          <p:nvPr/>
-        </p:nvSpPr>
-        <p:spPr>
-          <a:xfrm>
-            <a:off x="2039112" y="1572768"/>
-            <a:ext cx="1755648" cy="2340864"/>
-          </a:xfrm>
-          <a:prstGeom prst="rect">
-            <a:avLst/>
-          </a:prstGeom>
-          <a:solidFill>
-            <a:srgbClr val="F2F2F2"/>
-          </a:solidFill>
-          <a:ln w="12700">
-            <a:solidFill>
-              <a:srgbClr val="A6A6A6"/>
-            </a:solidFill>
-            <a:prstDash val="dash"/>
-          </a:ln>
-        </p:spPr>
-        <p:txBody>
-          <a:bodyPr lIns="45716" tIns="45716" rIns="45716" bIns="45716" anchor="ctr">
-            <a:normAutofit/>
-          </a:bodyPr>
-          <a:lstStyle/>
-          <a:p>
-            <a:pPr algn="ctr">
-              <a:lnSpc>
-                <a:spcPct val="100000"/>
-              </a:lnSpc>
-            </a:pPr>
-            <a:r>
-              <a:rPr lang="en-US" sz="900" b="1">
-                <a:solidFill>
-                  <a:srgbClr val="7F7F7F"/>
-                </a:solidFill>
-                <a:latin typeface="Century Gothic" panose="020B0502020202020204" pitchFamily="34" charset="0"/>
-              </a:rPr>
-              <a:t>PHOTO B</a:t>
-            </a:r>
-          </a:p>
-          <a:p>
-            <a:pPr algn="ctr">
-              <a:lnSpc>
-                <a:spcPct val="100000"/>
-              </a:lnSpc>
-            </a:pPr>
-            <a:r>
-              <a:rPr lang="en-US" sz="900" b="0">
-                <a:solidFill>
-                  <a:srgbClr val="7F7F7F"/>
-                </a:solidFill>
-                <a:latin typeface="Century Gothic" panose="020B0502020202020204" pitchFamily="34" charset="0"/>
-              </a:rPr>
-              <a:t>Containment — STOP /</a:t>
-            </a:r>
-          </a:p>
-          <a:p>
-            <a:pPr algn="ctr">
-              <a:lnSpc>
-                <a:spcPct val="100000"/>
-              </a:lnSpc>
-            </a:pPr>
-            <a:r>
-              <a:rPr lang="en-US" sz="900" b="0">
-                <a:solidFill>
-                  <a:srgbClr val="7F7F7F"/>
-                </a:solidFill>
-                <a:latin typeface="Century Gothic" panose="020B0502020202020204" pitchFamily="34" charset="0"/>
-              </a:rPr>
-              <a:t>DO NOT ENTER floor</a:t>
-            </a:r>
-          </a:p>
-          <a:p>
-            <a:pPr algn="ctr">
-              <a:lnSpc>
-                <a:spcPct val="100000"/>
-              </a:lnSpc>
-            </a:pPr>
-            <a:r>
-              <a:rPr lang="en-US" sz="900" b="0">
-                <a:solidFill>
-                  <a:srgbClr val="7F7F7F"/>
-                </a:solidFill>
-                <a:latin typeface="Century Gothic" panose="020B0502020202020204" pitchFamily="34" charset="0"/>
-              </a:rPr>
-              <a:t>signage in the aisle</a:t>
-            </a:r>
-          </a:p>
-        </p:txBody>
-      </p:sp>
-      <p:sp>
-        <p:nvSpPr>
-          <p:cNvPr id="92" name="Caption A"/>
-          <p:cNvSpPr/>
-          <p:nvPr/>
-        </p:nvSpPr>
-        <p:spPr>
-          <a:xfrm>
-            <a:off x="182880" y="3931920"/>
+            <a:off x="79756" y="4427967"/>
             <a:ext cx="1755648" cy="384048"/>
           </a:xfrm>
           <a:prstGeom prst="rect">
@@ -7182,11 +7183,11 @@
               </a:lnSpc>
             </a:pPr>
             <a:r>
-              <a:rPr lang="en-US" sz="800" i="1">
+              <a:rPr lang="en-US" sz="800" i="1" dirty="0">
                 <a:solidFill>
                   <a:srgbClr val="404040"/>
                 </a:solidFill>
-                <a:latin typeface="Century Gothic" panose="020B0502020202020204" pitchFamily="34" charset="0"/>
+                <a:latin typeface="+mj-lt"/>
               </a:rPr>
               <a:t>Where he crossed. Exit was over the outside conveyor.</a:t>
             </a:r>
@@ -7195,13 +7196,19 @@
       </p:sp>
       <p:sp>
         <p:nvSpPr>
-          <p:cNvPr id="93" name="Caption B"/>
+          <p:cNvPr id="15" name="Caption B">
+            <a:extLst>
+              <a:ext uri="{FF2B5EF4-FFF2-40B4-BE49-F238E27FC236}">
+                <a16:creationId xmlns:a16="http://schemas.microsoft.com/office/drawing/2014/main" id="{6940A962-D0DB-FA6E-1554-B0CA1E7CF720}"/>
+              </a:ext>
+            </a:extLst>
+          </p:cNvPr>
           <p:cNvSpPr/>
           <p:nvPr/>
         </p:nvSpPr>
         <p:spPr>
           <a:xfrm>
-            <a:off x="2039112" y="3931920"/>
+            <a:off x="2059178" y="4427967"/>
             <a:ext cx="1755648" cy="384048"/>
           </a:xfrm>
           <a:prstGeom prst="rect">
@@ -7222,11 +7229,11 @@
               </a:lnSpc>
             </a:pPr>
             <a:r>
-              <a:rPr lang="en-US" sz="800" i="1">
+              <a:rPr lang="en-US" sz="800" i="1" dirty="0">
                 <a:solidFill>
                   <a:srgbClr val="404040"/>
                 </a:solidFill>
-                <a:latin typeface="Century Gothic" panose="020B0502020202020204" pitchFamily="34" charset="0"/>
+                <a:latin typeface="+mj-lt"/>
               </a:rPr>
               <a:t>Containment: aisles closed, signage both ends.</a:t>
             </a:r>
@@ -8126,6 +8133,21 @@
 </file>
 
 <file path=customXml/item1.xml><?xml version="1.0" encoding="utf-8"?>
+<?mso-contentType ?>
+<FormTemplates xmlns="http://schemas.microsoft.com/sharepoint/v3/contenttype/forms">
+  <Display>DocumentLibraryForm</Display>
+  <Edit>DocumentLibraryForm</Edit>
+  <New>DocumentLibraryForm</New>
+</FormTemplates>
+</file>
+
+<file path=customXml/item2.xml><?xml version="1.0" encoding="utf-8"?>
+<p:properties xmlns:p="http://schemas.microsoft.com/office/2006/metadata/properties" xmlns:xsi="http://www.w3.org/2001/XMLSchema-instance" xmlns:pc="http://schemas.microsoft.com/office/infopath/2007/PartnerControls">
+  <documentManagement/>
+</p:properties>
+</file>
+
+<file path=customXml/item3.xml><?xml version="1.0" encoding="utf-8"?>
 <ct:contentTypeSchema xmlns:ct="http://schemas.microsoft.com/office/2006/metadata/contentType" xmlns:ma="http://schemas.microsoft.com/office/2006/metadata/properties/metaAttributes" ct:_="" ma:_="" ma:contentTypeName="Document" ma:contentTypeID="0x010100F707949C3B4B6F4FAE55C3B513F04342" ma:contentTypeVersion="13" ma:contentTypeDescription="Create a new document." ma:contentTypeScope="" ma:versionID="81bb08b6d6353efce4abbb7320561250">
   <xsd:schema xmlns:xsd="http://www.w3.org/2001/XMLSchema" xmlns:xs="http://www.w3.org/2001/XMLSchema" xmlns:p="http://schemas.microsoft.com/office/2006/metadata/properties" xmlns:ns2="152f58a6-a63c-4812-9377-d2ca6eb2262c" xmlns:ns3="e1a40294-510b-4e5d-8d04-b2db777038e9" targetNamespace="http://schemas.microsoft.com/office/2006/metadata/properties" ma:root="true" ma:fieldsID="ca2a9bd2c72a6a0f604414e0dcb09bd7" ns2:_="" ns3:_="">
     <xsd:import namespace="152f58a6-a63c-4812-9377-d2ca6eb2262c"/>
@@ -8346,30 +8368,10 @@
 </ct:contentTypeSchema>
 </file>
 
-<file path=customXml/item2.xml><?xml version="1.0" encoding="utf-8"?>
-<p:properties xmlns:p="http://schemas.microsoft.com/office/2006/metadata/properties" xmlns:xsi="http://www.w3.org/2001/XMLSchema-instance" xmlns:pc="http://schemas.microsoft.com/office/infopath/2007/PartnerControls">
-  <documentManagement/>
-</p:properties>
-</file>
-
-<file path=customXml/item3.xml><?xml version="1.0" encoding="utf-8"?>
-<?mso-contentType ?>
-<FormTemplates xmlns="http://schemas.microsoft.com/sharepoint/v3/contenttype/forms">
-  <Display>DocumentLibraryForm</Display>
-  <Edit>DocumentLibraryForm</Edit>
-  <New>DocumentLibraryForm</New>
-</FormTemplates>
-</file>
-
 <file path=customXml/itemProps1.xml><?xml version="1.0" encoding="utf-8"?>
-<ds:datastoreItem xmlns:ds="http://schemas.openxmlformats.org/officeDocument/2006/customXml" ds:itemID="{9552E5CD-2D64-4590-8CF4-16825A47A55A}">
+<ds:datastoreItem xmlns:ds="http://schemas.openxmlformats.org/officeDocument/2006/customXml" ds:itemID="{ED37CCF1-7A9E-4042-B4F8-83EB3EDBEFFD}">
   <ds:schemaRefs>
-    <ds:schemaRef ds:uri="http://schemas.microsoft.com/office/2006/metadata/contentType"/>
-    <ds:schemaRef ds:uri="http://schemas.microsoft.com/office/2006/metadata/properties/metaAttributes"/>
-    <ds:schemaRef ds:uri="http://www.w3.org/2000/xmlns/"/>
-    <ds:schemaRef ds:uri="http://www.w3.org/2001/XMLSchema"/>
-    <ds:schemaRef ds:uri="152f58a6-a63c-4812-9377-d2ca6eb2262c"/>
-    <ds:schemaRef ds:uri="e1a40294-510b-4e5d-8d04-b2db777038e9"/>
+    <ds:schemaRef ds:uri="http://schemas.microsoft.com/sharepoint/v3/contenttype/forms"/>
   </ds:schemaRefs>
 </ds:datastoreItem>
 </file>
@@ -8379,14 +8381,27 @@
   <ds:schemaRefs>
     <ds:schemaRef ds:uri="http://schemas.microsoft.com/office/2006/metadata/properties"/>
     <ds:schemaRef ds:uri="http://www.w3.org/2000/xmlns/"/>
+    <ds:schemaRef ds:uri="http://schemas.microsoft.com/office/infopath/2007/PartnerControls"/>
   </ds:schemaRefs>
 </ds:datastoreItem>
 </file>
 
 <file path=customXml/itemProps3.xml><?xml version="1.0" encoding="utf-8"?>
-<ds:datastoreItem xmlns:ds="http://schemas.openxmlformats.org/officeDocument/2006/customXml" ds:itemID="{ED37CCF1-7A9E-4042-B4F8-83EB3EDBEFFD}">
+<ds:datastoreItem xmlns:ds="http://schemas.openxmlformats.org/officeDocument/2006/customXml" ds:itemID="{9552E5CD-2D64-4590-8CF4-16825A47A55A}">
   <ds:schemaRefs>
-    <ds:schemaRef ds:uri="http://schemas.microsoft.com/sharepoint/v3/contenttype/forms"/>
+    <ds:schemaRef ds:uri="http://schemas.microsoft.com/office/2006/metadata/contentType"/>
+    <ds:schemaRef ds:uri="http://schemas.microsoft.com/office/2006/metadata/properties/metaAttributes"/>
+    <ds:schemaRef ds:uri="http://www.w3.org/2000/xmlns/"/>
+    <ds:schemaRef ds:uri="http://www.w3.org/2001/XMLSchema"/>
+    <ds:schemaRef ds:uri="152f58a6-a63c-4812-9377-d2ca6eb2262c"/>
+    <ds:schemaRef ds:uri="e1a40294-510b-4e5d-8d04-b2db777038e9"/>
+    <ds:schemaRef ds:uri="http://schemas.microsoft.com/office/2006/metadata/properties"/>
+    <ds:schemaRef ds:uri="http://schemas.microsoft.com/office/2006/documentManagement/types"/>
+    <ds:schemaRef ds:uri="http://schemas.microsoft.com/office/infopath/2007/PartnerControls"/>
+    <ds:schemaRef ds:uri="http://schemas.openxmlformats.org/package/2006/metadata/core-properties"/>
+    <ds:schemaRef ds:uri="http://purl.org/dc/elements/1.1/"/>
+    <ds:schemaRef ds:uri="http://purl.org/dc/terms/"/>
+    <ds:schemaRef ds:uri="http://schemas.microsoft.com/internal/obd"/>
   </ds:schemaRefs>
 </ds:datastoreItem>
 </file>
